--- a/docs/presentaciones/classes/clase-057-fine-tuning-grid-search-randomized-search-presentacion.pptx
+++ b/docs/presentaciones/classes/clase-057-fine-tuning-grid-search-randomized-search-presentacion.pptx
@@ -4955,7 +4955,7 @@
                 </a:solidFill>
                 <a:latin typeface="Segoe UI"/>
               </a:rPr>
-              <a:t>Primer bloque ejecutable del notebook.</a:t>
+              <a:t>Dejamos de tunear "a ojo": GridSearchCV para espacios chicos y discretos, RandomizedSearchCV con distribuciones para espacios grandes o continuos, todo dentro de un Pipeline para evitar leakage del preprocesamiento.</a:t>
             </a:r>
           </a:p>
         </p:txBody>
@@ -5042,7 +5042,311 @@
                 </a:solidFill>
                 <a:latin typeface="Courier New"/>
               </a:rPr>
-              <a:t># Imports y configuración inicial</a:t>
+              <a:t>import numpy as np</a:t>
+            </a:r>
+          </a:p>
+          <a:p>
+            <a:pPr>
+              <a:defRPr sz="1200" b="0">
+                <a:solidFill>
+                  <a:srgbClr val="F8FAFC"/>
+                </a:solidFill>
+                <a:latin typeface="Courier New"/>
+              </a:defRPr>
+            </a:pPr>
+            <a:r>
+              <a:rPr sz="1200" b="0">
+                <a:solidFill>
+                  <a:srgbClr val="F8FAFC"/>
+                </a:solidFill>
+                <a:latin typeface="Courier New"/>
+              </a:rPr>
+              <a:t>import pandas as pd</a:t>
+            </a:r>
+          </a:p>
+          <a:p>
+            <a:pPr>
+              <a:defRPr sz="1200" b="0">
+                <a:solidFill>
+                  <a:srgbClr val="F8FAFC"/>
+                </a:solidFill>
+                <a:latin typeface="Courier New"/>
+              </a:defRPr>
+            </a:pPr>
+            <a:r>
+              <a:rPr sz="1200" b="0">
+                <a:solidFill>
+                  <a:srgbClr val="F8FAFC"/>
+                </a:solidFill>
+                <a:latin typeface="Courier New"/>
+              </a:rPr>
+              <a:t>import time</a:t>
+            </a:r>
+          </a:p>
+          <a:p>
+            <a:pPr>
+              <a:defRPr sz="1200" b="0">
+                <a:solidFill>
+                  <a:srgbClr val="F8FAFC"/>
+                </a:solidFill>
+                <a:latin typeface="Courier New"/>
+              </a:defRPr>
+            </a:pPr>
+            <a:r>
+              <a:rPr sz="1200" b="0">
+                <a:solidFill>
+                  <a:srgbClr val="F8FAFC"/>
+                </a:solidFill>
+                <a:latin typeface="Courier New"/>
+              </a:rPr>
+              <a:t>import matplotlib.pyplot as plt</a:t>
+            </a:r>
+          </a:p>
+          <a:p>
+            <a:pPr>
+              <a:defRPr sz="1200" b="0">
+                <a:solidFill>
+                  <a:srgbClr val="F8FAFC"/>
+                </a:solidFill>
+                <a:latin typeface="Courier New"/>
+              </a:defRPr>
+            </a:pPr>
+            <a:r>
+              <a:rPr sz="1200" b="0">
+                <a:solidFill>
+                  <a:srgbClr val="F8FAFC"/>
+                </a:solidFill>
+                <a:latin typeface="Courier New"/>
+              </a:rPr>
+              <a:t>from scipy.stats import randint, loguniform</a:t>
+            </a:r>
+          </a:p>
+          <a:p>
+            <a:pPr>
+              <a:defRPr sz="1200" b="0">
+                <a:solidFill>
+                  <a:srgbClr val="F8FAFC"/>
+                </a:solidFill>
+                <a:latin typeface="Courier New"/>
+              </a:defRPr>
+            </a:pPr>
+            <a:r>
+              <a:rPr sz="1200" b="0">
+                <a:solidFill>
+                  <a:srgbClr val="F8FAFC"/>
+                </a:solidFill>
+                <a:latin typeface="Courier New"/>
+              </a:rPr>
+              <a:t>from sklearn.datasets import load_diabetes</a:t>
+            </a:r>
+          </a:p>
+          <a:p>
+            <a:pPr>
+              <a:defRPr sz="1200" b="0">
+                <a:solidFill>
+                  <a:srgbClr val="F8FAFC"/>
+                </a:solidFill>
+                <a:latin typeface="Courier New"/>
+              </a:defRPr>
+            </a:pPr>
+            <a:r>
+              <a:rPr sz="1200" b="0">
+                <a:solidFill>
+                  <a:srgbClr val="F8FAFC"/>
+                </a:solidFill>
+                <a:latin typeface="Courier New"/>
+              </a:rPr>
+              <a:t>from sklearn.model_selection import train_test_split, GridSearchCV, RandomizedSearchCV</a:t>
+            </a:r>
+          </a:p>
+          <a:p>
+            <a:pPr>
+              <a:defRPr sz="1200" b="0">
+                <a:solidFill>
+                  <a:srgbClr val="F8FAFC"/>
+                </a:solidFill>
+                <a:latin typeface="Courier New"/>
+              </a:defRPr>
+            </a:pPr>
+            <a:r>
+              <a:rPr sz="1200" b="0">
+                <a:solidFill>
+                  <a:srgbClr val="F8FAFC"/>
+                </a:solidFill>
+                <a:latin typeface="Courier New"/>
+              </a:rPr>
+              <a:t>from sklearn.pipeline import Pipeline</a:t>
+            </a:r>
+          </a:p>
+          <a:p>
+            <a:pPr>
+              <a:defRPr sz="1200" b="0">
+                <a:solidFill>
+                  <a:srgbClr val="F8FAFC"/>
+                </a:solidFill>
+                <a:latin typeface="Courier New"/>
+              </a:defRPr>
+            </a:pPr>
+            <a:r>
+              <a:rPr sz="1200" b="0">
+                <a:solidFill>
+                  <a:srgbClr val="F8FAFC"/>
+                </a:solidFill>
+                <a:latin typeface="Courier New"/>
+              </a:rPr>
+              <a:t>from sklearn.preprocessing import StandardScaler</a:t>
+            </a:r>
+          </a:p>
+          <a:p>
+            <a:pPr>
+              <a:defRPr sz="1200" b="0">
+                <a:solidFill>
+                  <a:srgbClr val="F8FAFC"/>
+                </a:solidFill>
+                <a:latin typeface="Courier New"/>
+              </a:defRPr>
+            </a:pPr>
+            <a:r>
+              <a:rPr sz="1200" b="0">
+                <a:solidFill>
+                  <a:srgbClr val="F8FAFC"/>
+                </a:solidFill>
+                <a:latin typeface="Courier New"/>
+              </a:rPr>
+              <a:t>from sklearn.ensemble import RandomForestRegressor</a:t>
+            </a:r>
+          </a:p>
+          <a:p>
+            <a:pPr>
+              <a:defRPr sz="1200" b="0">
+                <a:solidFill>
+                  <a:srgbClr val="F8FAFC"/>
+                </a:solidFill>
+                <a:latin typeface="Courier New"/>
+              </a:defRPr>
+            </a:pPr>
+            <a:r>
+              <a:rPr sz="1200" b="0">
+                <a:solidFill>
+                  <a:srgbClr val="F8FAFC"/>
+                </a:solidFill>
+                <a:latin typeface="Courier New"/>
+              </a:rPr>
+              <a:t>from sklearn.svm import SVR</a:t>
+            </a:r>
+          </a:p>
+          <a:p>
+            <a:pPr>
+              <a:defRPr sz="1200" b="0">
+                <a:solidFill>
+                  <a:srgbClr val="F8FAFC"/>
+                </a:solidFill>
+                <a:latin typeface="Courier New"/>
+              </a:defRPr>
+            </a:pPr>
+            <a:r>
+              <a:rPr sz="1200" b="0">
+                <a:solidFill>
+                  <a:srgbClr val="F8FAFC"/>
+                </a:solidFill>
+                <a:latin typeface="Courier New"/>
+              </a:rPr>
+              <a:t>from sklearn.metrics import root_mean_squared_error</a:t>
+            </a:r>
+          </a:p>
+          <a:p>
+            <a:pPr>
+              <a:defRPr sz="1200" b="0">
+                <a:solidFill>
+                  <a:srgbClr val="F8FAFC"/>
+                </a:solidFill>
+                <a:latin typeface="Courier New"/>
+              </a:defRPr>
+            </a:pPr>
+            <a:r>
+              <a:rPr sz="1200" b="0">
+                <a:solidFill>
+                  <a:srgbClr val="F8FAFC"/>
+                </a:solidFill>
+                <a:latin typeface="Courier New"/>
+              </a:rPr>
+              <a:t> </a:t>
+            </a:r>
+          </a:p>
+          <a:p>
+            <a:pPr>
+              <a:defRPr sz="1200" b="0">
+                <a:solidFill>
+                  <a:srgbClr val="F8FAFC"/>
+                </a:solidFill>
+                <a:latin typeface="Courier New"/>
+              </a:defRPr>
+            </a:pPr>
+            <a:r>
+              <a:rPr sz="1200" b="0">
+                <a:solidFill>
+                  <a:srgbClr val="F8FAFC"/>
+                </a:solidFill>
+                <a:latin typeface="Courier New"/>
+              </a:rPr>
+              <a:t>np.random.seed(42)</a:t>
+            </a:r>
+          </a:p>
+          <a:p>
+            <a:pPr>
+              <a:defRPr sz="1200" b="0">
+                <a:solidFill>
+                  <a:srgbClr val="F8FAFC"/>
+                </a:solidFill>
+                <a:latin typeface="Courier New"/>
+              </a:defRPr>
+            </a:pPr>
+            <a:r>
+              <a:rPr sz="1200" b="0">
+                <a:solidFill>
+                  <a:srgbClr val="F8FAFC"/>
+                </a:solidFill>
+                <a:latin typeface="Courier New"/>
+              </a:rPr>
+              <a:t>X, y = load_diabetes(return_X_y=True)</a:t>
+            </a:r>
+          </a:p>
+          <a:p>
+            <a:pPr>
+              <a:defRPr sz="1200" b="0">
+                <a:solidFill>
+                  <a:srgbClr val="F8FAFC"/>
+                </a:solidFill>
+                <a:latin typeface="Courier New"/>
+              </a:defRPr>
+            </a:pPr>
+            <a:r>
+              <a:rPr sz="1200" b="0">
+                <a:solidFill>
+                  <a:srgbClr val="F8FAFC"/>
+                </a:solidFill>
+                <a:latin typeface="Courier New"/>
+              </a:rPr>
+              <a:t>Xtr, Xte, ytr, yte = train_test_split(X, y, test_size=0.2, random_state=42)</a:t>
+            </a:r>
+          </a:p>
+          <a:p>
+            <a:pPr>
+              <a:defRPr sz="1200" b="0">
+                <a:solidFill>
+                  <a:srgbClr val="F8FAFC"/>
+                </a:solidFill>
+                <a:latin typeface="Courier New"/>
+              </a:defRPr>
+            </a:pPr>
+            <a:r>
+              <a:rPr sz="1200" b="0">
+                <a:solidFill>
+                  <a:srgbClr val="F8FAFC"/>
+                </a:solidFill>
+                <a:latin typeface="Courier New"/>
+              </a:rPr>
+              <a:t>print('train', Xtr.shape, 'test', Xte.shape)</a:t>
             </a:r>
           </a:p>
         </p:txBody>

--- a/docs/presentaciones/classes/clase-057-fine-tuning-grid-search-randomized-search-presentacion.pptx
+++ b/docs/presentaciones/classes/clase-057-fine-tuning-grid-search-randomized-search-presentacion.pptx
@@ -3272,7 +3272,7 @@
                 </a:solidFill>
                 <a:latin typeface="Segoe UI"/>
               </a:rPr>
-              <a:t>Parte: 1 — Machine Learning Clásico · Fuente: Géron, cap. 2.  Duración estimada: 70 min.</a:t>
+              <a:t>Parte: 1 — Machine Learning Clásico · Fuente: Géron, cap. 2.  Duración estimada: 70 min. · Nivel: Intermedio</a:t>
             </a:r>
           </a:p>
         </p:txBody>
@@ -3581,7 +3581,7 @@
                 </a:solidFill>
                 <a:latin typeface="Segoe UI"/>
               </a:rPr>
-              <a:t>Parte: 1 — Machine Learning Clásico · Fuente: Géron, cap. 2.  Duración estimada: 70 min.</a:t>
+              <a:t>Parte: 1 — Machine Learning Clásico · Fuente: Géron, cap. 2.  Duración estimada: 70 min. · Nivel: Intermedio</a:t>
             </a:r>
           </a:p>
         </p:txBody>
